--- a/10-go_programming-main/1일차_판서.pptx
+++ b/10-go_programming-main/1일차_판서.pptx
@@ -3385,7 +3385,7 @@
               <a:rPr lang="en-US" altLang="ko-KR" sz="3200">
                 <a:latin typeface="Consolas" panose="020B0609020204030204" pitchFamily="49" charset="0"/>
               </a:rPr>
-              <a:t>https://github.com/imguru-mooc/go_programming</a:t>
+              <a:t>https://github.com/DevOps0906/go_programming</a:t>
             </a:r>
           </a:p>
           <a:p>
@@ -3398,19 +3398,19 @@
               <a:rPr lang="ko-KR" altLang="en-US" sz="3200">
                 <a:latin typeface="Consolas" panose="020B0609020204030204" pitchFamily="49" charset="0"/>
               </a:rPr>
-              <a:t>강사명 </a:t>
+              <a:t>강사명 : 디지털노마드연구소</a:t>
             </a:r>
             <a:r>
               <a:rPr lang="en-US" altLang="ko-KR" sz="3200">
                 <a:latin typeface="Consolas" panose="020B0609020204030204" pitchFamily="49" charset="0"/>
               </a:rPr>
-              <a:t>: </a:t>
+              <a:t/>
             </a:r>
             <a:r>
               <a:rPr lang="ko-KR" altLang="en-US" sz="3200">
                 <a:latin typeface="Consolas" panose="020B0609020204030204" pitchFamily="49" charset="0"/>
               </a:rPr>
-              <a:t>김정인</a:t>
+              <a:t/>
             </a:r>
             <a:endParaRPr lang="en-US" altLang="ko-KR" sz="3200">
               <a:latin typeface="Consolas" panose="020B0609020204030204" pitchFamily="49" charset="0"/>
